--- a/projects/测试DEMO/最终文档/ppt_slides/slide_03.pptx
+++ b/projects/测试DEMO/最终文档/ppt_slides/slide_03.pptx
@@ -3090,23 +3090,97 @@
       <p:grpSpPr/>
       <p:sp>
         <p:nvSpPr>
-          <p:cNvPr id="2" name="Rectangle 1"/>
-          <p:cNvSpPr/>
+          <p:cNvPr id="2" name="TextBox 1"/>
+          <p:cNvSpPr txBox="1"/>
           <p:nvPr/>
         </p:nvSpPr>
         <p:spPr>
           <a:xfrm>
-            <a:off x="0" y="0"/>
-            <a:ext cx="12191695" cy="6858000"/>
+            <a:off x="457200" y="365760"/>
+            <a:ext cx="9144000" cy="731520"/>
           </a:xfrm>
           <a:prstGeom prst="rect">
             <a:avLst/>
           </a:prstGeom>
+          <a:noFill/>
+        </p:spPr>
+        <p:txBody>
+          <a:bodyPr wrap="none">
+            <a:spAutoFit/>
+          </a:bodyPr>
+          <a:lstStyle/>
+          <a:p>
+            <a:pPr>
+              <a:defRPr sz="3200" b="1">
+                <a:solidFill>
+                  <a:srgbClr val="A3262A"/>
+                </a:solidFill>
+                <a:latin typeface="Microsoft YaHei"/>
+              </a:defRPr>
+            </a:pPr>
+            <a:r>
+              <a:t>案例C：跨工厂 STO 报表验证</a:t>
+            </a:r>
+          </a:p>
+        </p:txBody>
+      </p:sp>
+      <p:sp>
+        <p:nvSpPr>
+          <p:cNvPr id="3" name="TextBox 2"/>
+          <p:cNvSpPr txBox="1"/>
+          <p:nvPr/>
+        </p:nvSpPr>
+        <p:spPr>
+          <a:xfrm>
+            <a:off x="457200" y="1005840"/>
+            <a:ext cx="9144000" cy="457200"/>
+          </a:xfrm>
+          <a:prstGeom prst="rect">
+            <a:avLst/>
+          </a:prstGeom>
+          <a:noFill/>
+        </p:spPr>
+        <p:txBody>
+          <a:bodyPr wrap="none">
+            <a:spAutoFit/>
+          </a:bodyPr>
+          <a:lstStyle/>
+          <a:p>
+            <a:pPr>
+              <a:defRPr sz="2000" b="1">
+                <a:solidFill>
+                  <a:srgbClr val="222222"/>
+                </a:solidFill>
+                <a:latin typeface="Microsoft YaHei"/>
+              </a:defRPr>
+            </a:pPr>
+            <a:r>
+              <a:t>高复杂度场景引发“修复-爆炸”模式，效率反降 60%</a:t>
+            </a:r>
+          </a:p>
+        </p:txBody>
+      </p:sp>
+      <p:sp>
+        <p:nvSpPr>
+          <p:cNvPr id="4" name="Rounded Rectangle 3"/>
+          <p:cNvSpPr/>
+          <p:nvPr/>
+        </p:nvSpPr>
+        <p:spPr>
+          <a:xfrm>
+            <a:off x="457200" y="1645920"/>
+            <a:ext cx="5943600" cy="4754880"/>
+          </a:xfrm>
+          <a:prstGeom prst="roundRect">
+            <a:avLst/>
+          </a:prstGeom>
           <a:solidFill>
-            <a:srgbClr val="14161A"/>
+            <a:srgbClr val="FDF2F0"/>
           </a:solidFill>
-          <a:ln>
-            <a:noFill/>
+          <a:ln w="12700">
+            <a:solidFill>
+              <a:srgbClr val="CB4335"/>
+            </a:solidFill>
           </a:ln>
         </p:spPr>
         <p:style>
@@ -3133,158 +3207,23 @@
       </p:sp>
       <p:sp>
         <p:nvSpPr>
-          <p:cNvPr id="3" name="TextBox 2"/>
-          <p:cNvSpPr txBox="1"/>
+          <p:cNvPr id="5" name="Oval 4"/>
+          <p:cNvSpPr/>
           <p:nvPr/>
         </p:nvSpPr>
         <p:spPr>
           <a:xfrm>
-            <a:off x="457200" y="365760"/>
-            <a:ext cx="9144000" cy="731520"/>
-          </a:xfrm>
-          <a:prstGeom prst="rect">
+            <a:off x="731520" y="1920240"/>
+            <a:ext cx="365760" cy="365760"/>
+          </a:xfrm>
+          <a:prstGeom prst="ellipse">
             <a:avLst/>
           </a:prstGeom>
           <a:noFill/>
-        </p:spPr>
-        <p:txBody>
-          <a:bodyPr wrap="none">
-            <a:spAutoFit/>
-          </a:bodyPr>
-          <a:lstStyle/>
-          <a:p>
-            <a:r>
-              <a:rPr sz="3200" b="1">
-                <a:solidFill>
-                  <a:srgbClr val="FFFFFF"/>
-                </a:solidFill>
-                <a:latin typeface="Microsoft YaHei"/>
-              </a:rPr>
-              <a:t>高复杂度：效率反降 </a:t>
-            </a:r>
-            <a:r>
-              <a:rPr sz="3200" b="1">
-                <a:solidFill>
-                  <a:srgbClr val="E53935"/>
-                </a:solidFill>
-                <a:latin typeface="Microsoft YaHei"/>
-              </a:rPr>
-              <a:t>60%</a:t>
-            </a:r>
-            <a:r>
-              <a:rPr sz="3200" b="1">
-                <a:solidFill>
-                  <a:srgbClr val="FFFFFF"/>
-                </a:solidFill>
-                <a:latin typeface="Microsoft YaHei"/>
-              </a:rPr>
-              <a:t> 的修复陷阱</a:t>
-            </a:r>
-          </a:p>
-        </p:txBody>
-      </p:sp>
-      <p:sp>
-        <p:nvSpPr>
-          <p:cNvPr id="4" name="TextBox 3"/>
-          <p:cNvSpPr txBox="1"/>
-          <p:nvPr/>
-        </p:nvSpPr>
-        <p:spPr>
-          <a:xfrm>
-            <a:off x="457200" y="1005840"/>
-            <a:ext cx="9144000" cy="457200"/>
-          </a:xfrm>
-          <a:prstGeom prst="rect">
-            <a:avLst/>
-          </a:prstGeom>
-          <a:noFill/>
-        </p:spPr>
-        <p:txBody>
-          <a:bodyPr wrap="none">
-            <a:spAutoFit/>
-          </a:bodyPr>
-          <a:lstStyle/>
-          <a:p>
-            <a:pPr>
-              <a:defRPr sz="1800">
-                <a:solidFill>
-                  <a:srgbClr val="AAAAAA"/>
-                </a:solidFill>
-                <a:latin typeface="Microsoft YaHei"/>
-              </a:defRPr>
-            </a:pPr>
-            <a:r>
-              <a:t>案例C — 跨工厂 STO 报表（18+ 关联表）</a:t>
-            </a:r>
-          </a:p>
-        </p:txBody>
-      </p:sp>
-      <p:sp>
-        <p:nvSpPr>
-          <p:cNvPr id="5" name="TextBox 4"/>
-          <p:cNvSpPr txBox="1"/>
-          <p:nvPr/>
-        </p:nvSpPr>
-        <p:spPr>
-          <a:xfrm>
-            <a:off x="4114800" y="2011680"/>
-            <a:ext cx="2286000" cy="1371600"/>
-          </a:xfrm>
-          <a:prstGeom prst="rect">
-            <a:avLst/>
-          </a:prstGeom>
-          <a:noFill/>
-        </p:spPr>
-        <p:txBody>
-          <a:bodyPr wrap="none">
-            <a:spAutoFit/>
-          </a:bodyPr>
-          <a:lstStyle/>
-          <a:p>
-            <a:pPr algn="ctr">
-              <a:defRPr sz="4800" b="1">
-                <a:solidFill>
-                  <a:srgbClr val="E53935"/>
-                </a:solidFill>
-              </a:defRPr>
-            </a:pPr>
-            <a:r>
-              <a:t>-60%</a:t>
-            </a:r>
-          </a:p>
-          <a:p>
-            <a:pPr algn="ctr">
-              <a:defRPr sz="2400" b="1">
-                <a:solidFill>
-                  <a:srgbClr val="E53935"/>
-                </a:solidFill>
-              </a:defRPr>
-            </a:pPr>
-            <a:r>
-              <a:t>效率损失</a:t>
-            </a:r>
-          </a:p>
-        </p:txBody>
-      </p:sp>
-      <p:sp>
-        <p:nvSpPr>
-          <p:cNvPr id="6" name="Down Arrow 5"/>
-          <p:cNvSpPr/>
-          <p:nvPr/>
-        </p:nvSpPr>
-        <p:spPr>
-          <a:xfrm rot="18900000">
-            <a:off x="5303520" y="3108960"/>
-            <a:ext cx="731520" cy="914400"/>
-          </a:xfrm>
-          <a:prstGeom prst="downArrow">
-            <a:avLst/>
-          </a:prstGeom>
-          <a:solidFill>
-            <a:srgbClr val="E53935"/>
-          </a:solidFill>
-          <a:ln>
-            <a:noFill/>
+          <a:ln w="25400">
+            <a:solidFill>
+              <a:srgbClr val="A3262A"/>
+            </a:solidFill>
           </a:ln>
         </p:spPr>
         <p:style>
@@ -3311,24 +3250,21 @@
       </p:sp>
       <p:sp>
         <p:nvSpPr>
-          <p:cNvPr id="7" name="Rounded Rectangle 6"/>
+          <p:cNvPr id="6" name="Rectangle 5"/>
           <p:cNvSpPr/>
           <p:nvPr/>
         </p:nvSpPr>
         <p:spPr>
           <a:xfrm>
-            <a:off x="6858000" y="1645920"/>
-            <a:ext cx="4846320" cy="2011680"/>
-          </a:xfrm>
-          <a:prstGeom prst="roundRect">
+            <a:off x="914400" y="1965960"/>
+            <a:ext cx="12700" cy="137160"/>
+          </a:xfrm>
+          <a:prstGeom prst="rect">
             <a:avLst/>
           </a:prstGeom>
-          <a:solidFill>
-            <a:srgbClr val="2A2D35"/>
-          </a:solidFill>
-          <a:ln>
+          <a:ln w="25400">
             <a:solidFill>
-              <a:srgbClr val="555555"/>
+              <a:srgbClr val="A3262A"/>
             </a:solidFill>
           </a:ln>
         </p:spPr>
@@ -3356,14 +3292,56 @@
       </p:sp>
       <p:sp>
         <p:nvSpPr>
+          <p:cNvPr id="7" name="Rectangle 6"/>
+          <p:cNvSpPr/>
+          <p:nvPr/>
+        </p:nvSpPr>
+        <p:spPr>
+          <a:xfrm>
+            <a:off x="914400" y="2103120"/>
+            <a:ext cx="137160" cy="12700"/>
+          </a:xfrm>
+          <a:prstGeom prst="rect">
+            <a:avLst/>
+          </a:prstGeom>
+          <a:ln w="25400">
+            <a:solidFill>
+              <a:srgbClr val="A3262A"/>
+            </a:solidFill>
+          </a:ln>
+        </p:spPr>
+        <p:style>
+          <a:lnRef idx="1">
+            <a:schemeClr val="accent1"/>
+          </a:lnRef>
+          <a:fillRef idx="3">
+            <a:schemeClr val="accent1"/>
+          </a:fillRef>
+          <a:effectRef idx="2">
+            <a:schemeClr val="accent1"/>
+          </a:effectRef>
+          <a:fontRef idx="minor">
+            <a:schemeClr val="lt1"/>
+          </a:fontRef>
+        </p:style>
+        <p:txBody>
+          <a:bodyPr rtlCol="0" anchor="ctr"/>
+          <a:lstStyle/>
+          <a:p>
+            <a:pPr algn="ctr"/>
+          </a:p>
+        </p:txBody>
+      </p:sp>
+      <p:sp>
+        <p:nvSpPr>
           <p:cNvPr id="8" name="TextBox 7"/>
           <p:cNvSpPr txBox="1"/>
           <p:nvPr/>
         </p:nvSpPr>
         <p:spPr>
           <a:xfrm>
-            <a:off x="7040880" y="1828800"/>
-            <a:ext cx="1828800" cy="365760"/>
+            <a:off x="1280160" y="1828800"/>
+            <a:ext cx="4937760" cy="731520"/>
           </a:xfrm>
           <a:prstGeom prst="rect">
             <a:avLst/>
@@ -3371,40 +3349,205 @@
           <a:noFill/>
         </p:spPr>
         <p:txBody>
+          <a:bodyPr wrap="square">
+            <a:spAutoFit/>
+          </a:bodyPr>
+          <a:lstStyle/>
+          <a:p>
+            <a:pPr>
+              <a:defRPr b="1" sz="1400">
+                <a:solidFill>
+                  <a:srgbClr val="A3262A"/>
+                </a:solidFill>
+              </a:defRPr>
+            </a:pPr>
+            <a:r>
+              <a:t>修复成本超标：</a:t>
+            </a:r>
+            <a:r>
+              <a:rPr b="0">
+                <a:solidFill>
+                  <a:srgbClr val="222222"/>
+                </a:solidFill>
+              </a:rPr>
+              <a:t>Claude Code 耗时 8 天，比手写（5天）增加 60% 工作量。</a:t>
+            </a:r>
+          </a:p>
+        </p:txBody>
+      </p:sp>
+      <p:sp>
+        <p:nvSpPr>
+          <p:cNvPr id="9" name="TextBox 8"/>
+          <p:cNvSpPr txBox="1"/>
+          <p:nvPr/>
+        </p:nvSpPr>
+        <p:spPr>
+          <a:xfrm>
+            <a:off x="1280160" y="2560320"/>
+            <a:ext cx="1371600" cy="274320"/>
+          </a:xfrm>
+          <a:prstGeom prst="rect">
+            <a:avLst/>
+          </a:prstGeom>
+          <a:noFill/>
+        </p:spPr>
+        <p:txBody>
           <a:bodyPr wrap="none">
             <a:spAutoFit/>
           </a:bodyPr>
           <a:lstStyle/>
           <a:p>
             <a:pPr>
-              <a:defRPr sz="1400">
+              <a:defRPr sz="1000"/>
+            </a:pPr>
+            <a:r>
+              <a:t>Claude Code: 8 天</a:t>
+            </a:r>
+          </a:p>
+        </p:txBody>
+      </p:sp>
+      <p:sp>
+        <p:nvSpPr>
+          <p:cNvPr id="10" name="Rectangle 9"/>
+          <p:cNvSpPr/>
+          <p:nvPr/>
+        </p:nvSpPr>
+        <p:spPr>
+          <a:xfrm>
+            <a:off x="2651760" y="2606040"/>
+            <a:ext cx="2651760" cy="182880"/>
+          </a:xfrm>
+          <a:prstGeom prst="rect">
+            <a:avLst/>
+          </a:prstGeom>
+          <a:solidFill>
+            <a:srgbClr val="CB4335"/>
+          </a:solidFill>
+          <a:ln>
+            <a:noFill/>
+          </a:ln>
+        </p:spPr>
+        <p:style>
+          <a:lnRef idx="1">
+            <a:schemeClr val="accent1"/>
+          </a:lnRef>
+          <a:fillRef idx="3">
+            <a:schemeClr val="accent1"/>
+          </a:fillRef>
+          <a:effectRef idx="2">
+            <a:schemeClr val="accent1"/>
+          </a:effectRef>
+          <a:fontRef idx="minor">
+            <a:schemeClr val="lt1"/>
+          </a:fontRef>
+        </p:style>
+        <p:txBody>
+          <a:bodyPr rtlCol="0" anchor="ctr"/>
+          <a:lstStyle/>
+          <a:p>
+            <a:pPr algn="ctr"/>
+          </a:p>
+        </p:txBody>
+      </p:sp>
+      <p:sp>
+        <p:nvSpPr>
+          <p:cNvPr id="11" name="Rounded Rectangle 10"/>
+          <p:cNvSpPr/>
+          <p:nvPr/>
+        </p:nvSpPr>
+        <p:spPr>
+          <a:xfrm>
+            <a:off x="4937760" y="2331720"/>
+            <a:ext cx="640080" cy="228600"/>
+          </a:xfrm>
+          <a:prstGeom prst="roundRect">
+            <a:avLst/>
+          </a:prstGeom>
+          <a:solidFill>
+            <a:srgbClr val="CB4335"/>
+          </a:solidFill>
+          <a:ln>
+            <a:noFill/>
+          </a:ln>
+        </p:spPr>
+        <p:style>
+          <a:lnRef idx="1">
+            <a:schemeClr val="accent1"/>
+          </a:lnRef>
+          <a:fillRef idx="3">
+            <a:schemeClr val="accent1"/>
+          </a:fillRef>
+          <a:effectRef idx="2">
+            <a:schemeClr val="accent1"/>
+          </a:effectRef>
+          <a:fontRef idx="minor">
+            <a:schemeClr val="lt1"/>
+          </a:fontRef>
+        </p:style>
+        <p:txBody>
+          <a:bodyPr rtlCol="0" anchor="ctr"/>
+          <a:lstStyle/>
+          <a:p>
+            <a:pPr algn="ctr">
+              <a:defRPr sz="1000">
                 <a:solidFill>
                   <a:srgbClr val="FFFFFF"/>
                 </a:solidFill>
               </a:defRPr>
             </a:pPr>
             <a:r>
-              <a:t>AI 修复</a:t>
-            </a:r>
-          </a:p>
-        </p:txBody>
-      </p:sp>
-      <p:sp>
-        <p:nvSpPr>
-          <p:cNvPr id="9" name="Rounded Rectangle 8"/>
+              <a:t>+60%</a:t>
+            </a:r>
+          </a:p>
+        </p:txBody>
+      </p:sp>
+      <p:sp>
+        <p:nvSpPr>
+          <p:cNvPr id="12" name="TextBox 11"/>
+          <p:cNvSpPr txBox="1"/>
+          <p:nvPr/>
+        </p:nvSpPr>
+        <p:spPr>
+          <a:xfrm>
+            <a:off x="1737360" y="2880360"/>
+            <a:ext cx="914400" cy="274320"/>
+          </a:xfrm>
+          <a:prstGeom prst="rect">
+            <a:avLst/>
+          </a:prstGeom>
+          <a:noFill/>
+        </p:spPr>
+        <p:txBody>
+          <a:bodyPr wrap="none">
+            <a:spAutoFit/>
+          </a:bodyPr>
+          <a:lstStyle/>
+          <a:p>
+            <a:pPr>
+              <a:defRPr sz="1000"/>
+            </a:pPr>
+            <a:r>
+              <a:t>手写: 5 天</a:t>
+            </a:r>
+          </a:p>
+        </p:txBody>
+      </p:sp>
+      <p:sp>
+        <p:nvSpPr>
+          <p:cNvPr id="13" name="Rectangle 12"/>
           <p:cNvSpPr/>
           <p:nvPr/>
         </p:nvSpPr>
         <p:spPr>
           <a:xfrm>
-            <a:off x="7132320" y="2194560"/>
-            <a:ext cx="4297680" cy="365760"/>
-          </a:xfrm>
-          <a:prstGeom prst="roundRect">
+            <a:off x="2651760" y="2926080"/>
+            <a:ext cx="1737360" cy="182880"/>
+          </a:xfrm>
+          <a:prstGeom prst="rect">
             <a:avLst/>
           </a:prstGeom>
           <a:solidFill>
-            <a:srgbClr val="9E1B22"/>
+            <a:srgbClr val="BDC3C7"/>
           </a:solidFill>
           <a:ln>
             <a:noFill/>
@@ -3434,14 +3577,57 @@
       </p:sp>
       <p:sp>
         <p:nvSpPr>
-          <p:cNvPr id="10" name="TextBox 9"/>
+          <p:cNvPr id="14" name="Up Arrow 13"/>
+          <p:cNvSpPr/>
+          <p:nvPr/>
+        </p:nvSpPr>
+        <p:spPr>
+          <a:xfrm>
+            <a:off x="731520" y="3566160"/>
+            <a:ext cx="137160" cy="320040"/>
+          </a:xfrm>
+          <a:prstGeom prst="upArrow">
+            <a:avLst/>
+          </a:prstGeom>
+          <a:noFill/>
+          <a:ln w="25400">
+            <a:solidFill>
+              <a:srgbClr val="A3262A"/>
+            </a:solidFill>
+          </a:ln>
+        </p:spPr>
+        <p:style>
+          <a:lnRef idx="1">
+            <a:schemeClr val="accent1"/>
+          </a:lnRef>
+          <a:fillRef idx="3">
+            <a:schemeClr val="accent1"/>
+          </a:fillRef>
+          <a:effectRef idx="2">
+            <a:schemeClr val="accent1"/>
+          </a:effectRef>
+          <a:fontRef idx="minor">
+            <a:schemeClr val="lt1"/>
+          </a:fontRef>
+        </p:style>
+        <p:txBody>
+          <a:bodyPr rtlCol="0" anchor="ctr"/>
+          <a:lstStyle/>
+          <a:p>
+            <a:pPr algn="ctr"/>
+          </a:p>
+        </p:txBody>
+      </p:sp>
+      <p:sp>
+        <p:nvSpPr>
+          <p:cNvPr id="15" name="TextBox 14"/>
           <p:cNvSpPr txBox="1"/>
           <p:nvPr/>
         </p:nvSpPr>
         <p:spPr>
           <a:xfrm>
-            <a:off x="8686800" y="2194560"/>
-            <a:ext cx="2560320" cy="365760"/>
+            <a:off x="868680" y="3520440"/>
+            <a:ext cx="274320" cy="365760"/>
           </a:xfrm>
           <a:prstGeom prst="rect">
             <a:avLst/>
@@ -3454,29 +3640,193 @@
           </a:bodyPr>
           <a:lstStyle/>
           <a:p>
-            <a:pPr algn="r">
-              <a:defRPr sz="1200" b="1">
+            <a:pPr>
+              <a:defRPr sz="1800" b="1">
+                <a:solidFill>
+                  <a:srgbClr val="A3262A"/>
+                </a:solidFill>
+              </a:defRPr>
+            </a:pPr>
+            <a:r>
+              <a:t>!!</a:t>
+            </a:r>
+          </a:p>
+        </p:txBody>
+      </p:sp>
+      <p:sp>
+        <p:nvSpPr>
+          <p:cNvPr id="16" name="TextBox 15"/>
+          <p:cNvSpPr txBox="1"/>
+          <p:nvPr/>
+        </p:nvSpPr>
+        <p:spPr>
+          <a:xfrm>
+            <a:off x="1280160" y="3474720"/>
+            <a:ext cx="4937760" cy="731520"/>
+          </a:xfrm>
+          <a:prstGeom prst="rect">
+            <a:avLst/>
+          </a:prstGeom>
+          <a:noFill/>
+        </p:spPr>
+        <p:txBody>
+          <a:bodyPr wrap="square">
+            <a:spAutoFit/>
+          </a:bodyPr>
+          <a:lstStyle/>
+          <a:p>
+            <a:pPr>
+              <a:defRPr b="1" sz="1400">
+                <a:solidFill>
+                  <a:srgbClr val="A3262A"/>
+                </a:solidFill>
+              </a:defRPr>
+            </a:pPr>
+            <a:r>
+              <a:t>错误爆炸模式：</a:t>
+            </a:r>
+            <a:r>
+              <a:rPr b="0">
+                <a:solidFill>
+                  <a:srgbClr val="222222"/>
+                </a:solidFill>
+              </a:rPr>
+              <a:t>语法错误随修复不减反增（3→2→9），逻辑产生严重矛盾。</a:t>
+            </a:r>
+          </a:p>
+        </p:txBody>
+      </p:sp>
+      <p:sp>
+        <p:nvSpPr>
+          <p:cNvPr id="17" name="Can 16"/>
+          <p:cNvSpPr/>
+          <p:nvPr/>
+        </p:nvSpPr>
+        <p:spPr>
+          <a:xfrm>
+            <a:off x="731520" y="4480560"/>
+            <a:ext cx="320040" cy="365760"/>
+          </a:xfrm>
+          <a:prstGeom prst="can">
+            <a:avLst/>
+          </a:prstGeom>
+          <a:noFill/>
+          <a:ln w="25400">
+            <a:solidFill>
+              <a:srgbClr val="A3262A"/>
+            </a:solidFill>
+          </a:ln>
+        </p:spPr>
+        <p:style>
+          <a:lnRef idx="1">
+            <a:schemeClr val="accent1"/>
+          </a:lnRef>
+          <a:fillRef idx="3">
+            <a:schemeClr val="accent1"/>
+          </a:fillRef>
+          <a:effectRef idx="2">
+            <a:schemeClr val="accent1"/>
+          </a:effectRef>
+          <a:fontRef idx="minor">
+            <a:schemeClr val="lt1"/>
+          </a:fontRef>
+        </p:style>
+        <p:txBody>
+          <a:bodyPr rtlCol="0" anchor="ctr"/>
+          <a:lstStyle/>
+          <a:p>
+            <a:pPr algn="ctr"/>
+          </a:p>
+        </p:txBody>
+      </p:sp>
+      <p:sp>
+        <p:nvSpPr>
+          <p:cNvPr id="18" name="Isosceles Triangle 17"/>
+          <p:cNvSpPr/>
+          <p:nvPr/>
+        </p:nvSpPr>
+        <p:spPr>
+          <a:xfrm>
+            <a:off x="914400" y="4663440"/>
+            <a:ext cx="228600" cy="228600"/>
+          </a:xfrm>
+          <a:prstGeom prst="triangle">
+            <a:avLst/>
+          </a:prstGeom>
+          <a:solidFill>
+            <a:srgbClr val="CB4335"/>
+          </a:solidFill>
+          <a:ln>
+            <a:noFill/>
+          </a:ln>
+        </p:spPr>
+        <p:style>
+          <a:lnRef idx="1">
+            <a:schemeClr val="accent1"/>
+          </a:lnRef>
+          <a:fillRef idx="3">
+            <a:schemeClr val="accent1"/>
+          </a:fillRef>
+          <a:effectRef idx="2">
+            <a:schemeClr val="accent1"/>
+          </a:effectRef>
+          <a:fontRef idx="minor">
+            <a:schemeClr val="lt1"/>
+          </a:fontRef>
+        </p:style>
+        <p:txBody>
+          <a:bodyPr rtlCol="0" anchor="ctr"/>
+          <a:lstStyle/>
+          <a:p>
+            <a:pPr algn="ctr"/>
+          </a:p>
+        </p:txBody>
+      </p:sp>
+      <p:sp>
+        <p:nvSpPr>
+          <p:cNvPr id="19" name="TextBox 18"/>
+          <p:cNvSpPr txBox="1"/>
+          <p:nvPr/>
+        </p:nvSpPr>
+        <p:spPr>
+          <a:xfrm>
+            <a:off x="896112" y="4617720"/>
+            <a:ext cx="228600" cy="228600"/>
+          </a:xfrm>
+          <a:prstGeom prst="rect">
+            <a:avLst/>
+          </a:prstGeom>
+          <a:noFill/>
+        </p:spPr>
+        <p:txBody>
+          <a:bodyPr wrap="none">
+            <a:spAutoFit/>
+          </a:bodyPr>
+          <a:lstStyle/>
+          <a:p>
+            <a:pPr algn="ctr">
+              <a:defRPr sz="1000" b="1">
                 <a:solidFill>
                   <a:srgbClr val="FFFFFF"/>
                 </a:solidFill>
               </a:defRPr>
             </a:pPr>
             <a:r>
-              <a:t>8 人天 (远超手写)</a:t>
-            </a:r>
-          </a:p>
-        </p:txBody>
-      </p:sp>
-      <p:sp>
-        <p:nvSpPr>
-          <p:cNvPr id="11" name="TextBox 10"/>
+              <a:t>!</a:t>
+            </a:r>
+          </a:p>
+        </p:txBody>
+      </p:sp>
+      <p:sp>
+        <p:nvSpPr>
+          <p:cNvPr id="20" name="TextBox 19"/>
           <p:cNvSpPr txBox="1"/>
           <p:nvPr/>
         </p:nvSpPr>
         <p:spPr>
           <a:xfrm>
-            <a:off x="7040880" y="2651760"/>
-            <a:ext cx="1828800" cy="365760"/>
+            <a:off x="1280160" y="4297680"/>
+            <a:ext cx="2560320" cy="914400"/>
           </a:xfrm>
           <a:prstGeom prst="rect">
             <a:avLst/>
@@ -3484,40 +3834,48 @@
           <a:noFill/>
         </p:spPr>
         <p:txBody>
-          <a:bodyPr wrap="none">
+          <a:bodyPr wrap="square">
             <a:spAutoFit/>
           </a:bodyPr>
           <a:lstStyle/>
           <a:p>
             <a:pPr>
-              <a:defRPr sz="1400">
+              <a:defRPr b="1" sz="1400">
                 <a:solidFill>
-                  <a:srgbClr val="FFFFFF"/>
+                  <a:srgbClr val="A3262A"/>
                 </a:solidFill>
               </a:defRPr>
             </a:pPr>
             <a:r>
-              <a:t>手写开发</a:t>
-            </a:r>
-          </a:p>
-        </p:txBody>
-      </p:sp>
-      <p:sp>
-        <p:nvSpPr>
-          <p:cNvPr id="12" name="Rounded Rectangle 11"/>
+              <a:t>数据字典幻觉：</a:t>
+            </a:r>
+            <a:r>
+              <a:rPr b="0">
+                <a:solidFill>
+                  <a:srgbClr val="222222"/>
+                </a:solidFill>
+              </a:rPr>
+              <a:t>累计虚构 10+ 项数据类型与表字段，修正时间远超直接编写。</a:t>
+            </a:r>
+          </a:p>
+        </p:txBody>
+      </p:sp>
+      <p:sp>
+        <p:nvSpPr>
+          <p:cNvPr id="21" name="Rounded Rectangle 20"/>
           <p:cNvSpPr/>
           <p:nvPr/>
         </p:nvSpPr>
         <p:spPr>
           <a:xfrm>
-            <a:off x="7132320" y="3017520"/>
-            <a:ext cx="2743200" cy="365760"/>
+            <a:off x="3840480" y="4389120"/>
+            <a:ext cx="2377440" cy="731520"/>
           </a:xfrm>
           <a:prstGeom prst="roundRect">
             <a:avLst/>
           </a:prstGeom>
           <a:solidFill>
-            <a:srgbClr val="4A6278"/>
+            <a:srgbClr val="FADFDF"/>
           </a:solidFill>
           <a:ln>
             <a:noFill/>
@@ -3541,66 +3899,47 @@
           <a:bodyPr rtlCol="0" anchor="ctr"/>
           <a:lstStyle/>
           <a:p>
-            <a:pPr algn="ctr"/>
-          </a:p>
-        </p:txBody>
-      </p:sp>
-      <p:sp>
-        <p:nvSpPr>
-          <p:cNvPr id="13" name="TextBox 12"/>
-          <p:cNvSpPr txBox="1"/>
-          <p:nvPr/>
-        </p:nvSpPr>
-        <p:spPr>
-          <a:xfrm>
-            <a:off x="8229600" y="3017520"/>
-            <a:ext cx="1463040" cy="365760"/>
-          </a:xfrm>
-          <a:prstGeom prst="rect">
-            <a:avLst/>
-          </a:prstGeom>
-          <a:noFill/>
-        </p:spPr>
-        <p:txBody>
-          <a:bodyPr wrap="none">
-            <a:spAutoFit/>
-          </a:bodyPr>
-          <a:lstStyle/>
-          <a:p>
-            <a:pPr algn="r">
-              <a:defRPr sz="1200" b="1">
+            <a:pPr algn="ctr">
+              <a:defRPr sz="1000">
                 <a:solidFill>
-                  <a:srgbClr val="FFFFFF"/>
+                  <a:srgbClr val="A3262A"/>
                 </a:solidFill>
+                <a:latin typeface="Consolas"/>
               </a:defRPr>
             </a:pPr>
             <a:r>
-              <a:t>5 人天</a:t>
-            </a:r>
-          </a:p>
-        </p:txBody>
-      </p:sp>
-      <p:sp>
-        <p:nvSpPr>
-          <p:cNvPr id="14" name="Rounded Rectangle 13"/>
+              <a:t>// Hallucination Detected:</a:t>
+            </a:r>
+            <a:br/>
+            <a:r>
+              <a:t>Z_STO_ROUTE_ID (不存在的字段)</a:t>
+            </a:r>
+            <a:br/>
+            <a:r>
+              <a:t>...</a:t>
+            </a:r>
+          </a:p>
+        </p:txBody>
+      </p:sp>
+      <p:sp>
+        <p:nvSpPr>
+          <p:cNvPr id="22" name="Multiply 21"/>
           <p:cNvSpPr/>
           <p:nvPr/>
         </p:nvSpPr>
         <p:spPr>
           <a:xfrm>
-            <a:off x="457200" y="3931920"/>
-            <a:ext cx="5943600" cy="2560320"/>
-          </a:xfrm>
-          <a:prstGeom prst="roundRect">
+            <a:off x="731520" y="5577840"/>
+            <a:ext cx="320040" cy="320040"/>
+          </a:xfrm>
+          <a:prstGeom prst="mathMultiply">
             <a:avLst/>
           </a:prstGeom>
           <a:solidFill>
-            <a:srgbClr val="1A1C22"/>
+            <a:srgbClr val="A3262A"/>
           </a:solidFill>
           <a:ln>
-            <a:solidFill>
-              <a:srgbClr val="555555"/>
-            </a:solidFill>
+            <a:noFill/>
           </a:ln>
         </p:spPr>
         <p:style>
@@ -3625,86 +3964,801 @@
           </a:p>
         </p:txBody>
       </p:sp>
-      <p:cxnSp>
-        <p:nvCxnSpPr>
-          <p:cNvPr id="15" name="Connector 14"/>
-          <p:cNvCxnSpPr/>
+      <p:sp>
+        <p:nvSpPr>
+          <p:cNvPr id="23" name="TextBox 22"/>
+          <p:cNvSpPr txBox="1"/>
           <p:nvPr/>
-        </p:nvCxnSpPr>
-        <p:spPr>
-          <a:xfrm>
-            <a:off x="914400" y="4206240"/>
-            <a:ext cx="0" cy="1828800"/>
-          </a:xfrm>
-          <a:prstGeom prst="line">
+        </p:nvSpPr>
+        <p:spPr>
+          <a:xfrm>
+            <a:off x="1280160" y="5486400"/>
+            <a:ext cx="4937760" cy="731520"/>
+          </a:xfrm>
+          <a:prstGeom prst="rect">
+            <a:avLst/>
+          </a:prstGeom>
+          <a:noFill/>
+        </p:spPr>
+        <p:txBody>
+          <a:bodyPr wrap="square">
+            <a:spAutoFit/>
+          </a:bodyPr>
+          <a:lstStyle/>
+          <a:p>
+            <a:pPr>
+              <a:defRPr b="1" sz="1400">
+                <a:solidFill>
+                  <a:srgbClr val="A3262A"/>
+                </a:solidFill>
+              </a:defRPr>
+            </a:pPr>
+            <a:r>
+              <a:t>实测结论：</a:t>
+            </a:r>
+            <a:r>
+              <a:rPr b="0">
+                <a:solidFill>
+                  <a:srgbClr val="222222"/>
+                </a:solidFill>
+              </a:rPr>
+              <a:t>复杂业务流下，AI 无法理解上下文关联，修复可行性为“否”。</a:t>
+            </a:r>
+          </a:p>
+        </p:txBody>
+      </p:sp>
+      <p:sp>
+        <p:nvSpPr>
+          <p:cNvPr id="24" name="Rounded Rectangle 23"/>
+          <p:cNvSpPr/>
+          <p:nvPr/>
+        </p:nvSpPr>
+        <p:spPr>
+          <a:xfrm>
+            <a:off x="6583680" y="1645920"/>
+            <a:ext cx="5120640" cy="4754880"/>
+          </a:xfrm>
+          <a:prstGeom prst="roundRect">
+            <a:avLst/>
+          </a:prstGeom>
+          <a:solidFill>
+            <a:srgbClr val="F8F9FA"/>
+          </a:solidFill>
+          <a:ln w="12700">
+            <a:solidFill>
+              <a:srgbClr val="DDDDDD"/>
+            </a:solidFill>
+          </a:ln>
+        </p:spPr>
+        <p:style>
+          <a:lnRef idx="1">
+            <a:schemeClr val="accent1"/>
+          </a:lnRef>
+          <a:fillRef idx="3">
+            <a:schemeClr val="accent1"/>
+          </a:fillRef>
+          <a:effectRef idx="2">
+            <a:schemeClr val="accent1"/>
+          </a:effectRef>
+          <a:fontRef idx="minor">
+            <a:schemeClr val="lt1"/>
+          </a:fontRef>
+        </p:style>
+        <p:txBody>
+          <a:bodyPr rtlCol="0" anchor="ctr"/>
+          <a:lstStyle/>
+          <a:p>
+            <a:pPr algn="ctr"/>
+          </a:p>
+        </p:txBody>
+      </p:sp>
+      <p:sp>
+        <p:nvSpPr>
+          <p:cNvPr id="25" name="TextBox 24"/>
+          <p:cNvSpPr txBox="1"/>
+          <p:nvPr/>
+        </p:nvSpPr>
+        <p:spPr>
+          <a:xfrm>
+            <a:off x="6583680" y="1737360"/>
+            <a:ext cx="5120640" cy="365760"/>
+          </a:xfrm>
+          <a:prstGeom prst="rect">
+            <a:avLst/>
+          </a:prstGeom>
+          <a:noFill/>
+        </p:spPr>
+        <p:txBody>
+          <a:bodyPr wrap="none">
+            <a:spAutoFit/>
+          </a:bodyPr>
+          <a:lstStyle/>
+          <a:p>
+            <a:pPr algn="ctr">
+              <a:defRPr b="1" sz="1400"/>
+            </a:pPr>
+            <a:r>
+              <a:t>修复轮次与错误数趋势</a:t>
+            </a:r>
+          </a:p>
+        </p:txBody>
+      </p:sp>
+      <p:sp>
+        <p:nvSpPr>
+          <p:cNvPr id="26" name="Rectangle 25"/>
+          <p:cNvSpPr/>
+          <p:nvPr/>
+        </p:nvSpPr>
+        <p:spPr>
+          <a:xfrm>
+            <a:off x="7040880" y="3840480"/>
+            <a:ext cx="4297680" cy="12700"/>
+          </a:xfrm>
+          <a:prstGeom prst="rect">
             <a:avLst/>
           </a:prstGeom>
           <a:ln>
             <a:solidFill>
-              <a:srgbClr val="888888"/>
+              <a:srgbClr val="222222"/>
             </a:solidFill>
           </a:ln>
         </p:spPr>
         <p:style>
-          <a:lnRef idx="2">
+          <a:lnRef idx="1">
             <a:schemeClr val="accent1"/>
           </a:lnRef>
-          <a:fillRef idx="0">
+          <a:fillRef idx="3">
             <a:schemeClr val="accent1"/>
           </a:fillRef>
-          <a:effectRef idx="1">
+          <a:effectRef idx="2">
             <a:schemeClr val="accent1"/>
           </a:effectRef>
           <a:fontRef idx="minor">
-            <a:schemeClr val="tx1"/>
+            <a:schemeClr val="lt1"/>
           </a:fontRef>
         </p:style>
-      </p:cxnSp>
-      <p:cxnSp>
-        <p:nvCxnSpPr>
-          <p:cNvPr id="16" name="Connector 15"/>
-          <p:cNvCxnSpPr/>
+        <p:txBody>
+          <a:bodyPr rtlCol="0" anchor="ctr"/>
+          <a:lstStyle/>
+          <a:p>
+            <a:pPr algn="ctr"/>
+          </a:p>
+        </p:txBody>
+      </p:sp>
+      <p:sp>
+        <p:nvSpPr>
+          <p:cNvPr id="27" name="TextBox 26"/>
+          <p:cNvSpPr txBox="1"/>
           <p:nvPr/>
-        </p:nvCxnSpPr>
-        <p:spPr>
-          <a:xfrm>
-            <a:off x="914400" y="6035040"/>
-            <a:ext cx="2743200" cy="0"/>
-          </a:xfrm>
-          <a:prstGeom prst="line">
+        </p:nvSpPr>
+        <p:spPr>
+          <a:xfrm rot="16200000">
+            <a:off x="6492240" y="2926080"/>
+            <a:ext cx="731520" cy="365760"/>
+          </a:xfrm>
+          <a:prstGeom prst="rect">
+            <a:avLst/>
+          </a:prstGeom>
+          <a:noFill/>
+        </p:spPr>
+        <p:txBody>
+          <a:bodyPr wrap="none">
+            <a:spAutoFit/>
+          </a:bodyPr>
+          <a:lstStyle/>
+          <a:p>
+            <a:pPr>
+              <a:defRPr sz="1200" b="1"/>
+            </a:pPr>
+            <a:r>
+              <a:t>错误数</a:t>
+            </a:r>
+          </a:p>
+        </p:txBody>
+      </p:sp>
+      <p:sp>
+        <p:nvSpPr>
+          <p:cNvPr id="28" name="Rectangle 27"/>
+          <p:cNvSpPr/>
+          <p:nvPr/>
+        </p:nvSpPr>
+        <p:spPr>
+          <a:xfrm>
+            <a:off x="7680960" y="3374136"/>
+            <a:ext cx="1463040" cy="155448"/>
+          </a:xfrm>
+          <a:prstGeom prst="rect">
+            <a:avLst/>
+          </a:prstGeom>
+          <a:ln w="38100">
+            <a:solidFill>
+              <a:srgbClr val="CB4335"/>
+            </a:solidFill>
+          </a:ln>
+        </p:spPr>
+        <p:style>
+          <a:lnRef idx="1">
+            <a:schemeClr val="accent1"/>
+          </a:lnRef>
+          <a:fillRef idx="3">
+            <a:schemeClr val="accent1"/>
+          </a:fillRef>
+          <a:effectRef idx="2">
+            <a:schemeClr val="accent1"/>
+          </a:effectRef>
+          <a:fontRef idx="minor">
+            <a:schemeClr val="lt1"/>
+          </a:fontRef>
+        </p:style>
+        <p:txBody>
+          <a:bodyPr rtlCol="0" anchor="ctr"/>
+          <a:lstStyle/>
+          <a:p>
+            <a:pPr algn="ctr"/>
+          </a:p>
+        </p:txBody>
+      </p:sp>
+      <p:sp>
+        <p:nvSpPr>
+          <p:cNvPr id="29" name="Rectangle 28"/>
+          <p:cNvSpPr/>
+          <p:nvPr/>
+        </p:nvSpPr>
+        <p:spPr>
+          <a:xfrm>
+            <a:off x="9144000" y="2441448"/>
+            <a:ext cx="1463040" cy="1088136"/>
+          </a:xfrm>
+          <a:prstGeom prst="rect">
+            <a:avLst/>
+          </a:prstGeom>
+          <a:ln w="38100">
+            <a:solidFill>
+              <a:srgbClr val="CB4335"/>
+            </a:solidFill>
+          </a:ln>
+        </p:spPr>
+        <p:style>
+          <a:lnRef idx="1">
+            <a:schemeClr val="accent1"/>
+          </a:lnRef>
+          <a:fillRef idx="3">
+            <a:schemeClr val="accent1"/>
+          </a:fillRef>
+          <a:effectRef idx="2">
+            <a:schemeClr val="accent1"/>
+          </a:effectRef>
+          <a:fontRef idx="minor">
+            <a:schemeClr val="lt1"/>
+          </a:fontRef>
+        </p:style>
+        <p:txBody>
+          <a:bodyPr rtlCol="0" anchor="ctr"/>
+          <a:lstStyle/>
+          <a:p>
+            <a:pPr algn="ctr"/>
+          </a:p>
+        </p:txBody>
+      </p:sp>
+      <p:sp>
+        <p:nvSpPr>
+          <p:cNvPr id="30" name="Oval 29"/>
+          <p:cNvSpPr/>
+          <p:nvPr/>
+        </p:nvSpPr>
+        <p:spPr>
+          <a:xfrm>
+            <a:off x="7607808" y="3300984"/>
+            <a:ext cx="146304" cy="146304"/>
+          </a:xfrm>
+          <a:prstGeom prst="ellipse">
+            <a:avLst/>
+          </a:prstGeom>
+          <a:solidFill>
+            <a:srgbClr val="CB4335"/>
+          </a:solidFill>
+          <a:ln>
+            <a:noFill/>
+          </a:ln>
+        </p:spPr>
+        <p:style>
+          <a:lnRef idx="1">
+            <a:schemeClr val="accent1"/>
+          </a:lnRef>
+          <a:fillRef idx="3">
+            <a:schemeClr val="accent1"/>
+          </a:fillRef>
+          <a:effectRef idx="2">
+            <a:schemeClr val="accent1"/>
+          </a:effectRef>
+          <a:fontRef idx="minor">
+            <a:schemeClr val="lt1"/>
+          </a:fontRef>
+        </p:style>
+        <p:txBody>
+          <a:bodyPr rtlCol="0" anchor="ctr"/>
+          <a:lstStyle/>
+          <a:p>
+            <a:pPr algn="ctr"/>
+          </a:p>
+        </p:txBody>
+      </p:sp>
+      <p:sp>
+        <p:nvSpPr>
+          <p:cNvPr id="31" name="TextBox 30"/>
+          <p:cNvSpPr txBox="1"/>
+          <p:nvPr/>
+        </p:nvSpPr>
+        <p:spPr>
+          <a:xfrm>
+            <a:off x="7406640" y="3008376"/>
+            <a:ext cx="548640" cy="274320"/>
+          </a:xfrm>
+          <a:prstGeom prst="rect">
+            <a:avLst/>
+          </a:prstGeom>
+          <a:noFill/>
+        </p:spPr>
+        <p:txBody>
+          <a:bodyPr wrap="none">
+            <a:spAutoFit/>
+          </a:bodyPr>
+          <a:lstStyle/>
+          <a:p>
+            <a:pPr algn="ctr">
+              <a:defRPr sz="1400" b="1">
+                <a:solidFill>
+                  <a:srgbClr val="A3262A"/>
+                </a:solidFill>
+              </a:defRPr>
+            </a:pPr>
+            <a:r>
+              <a:t>3</a:t>
+            </a:r>
+          </a:p>
+        </p:txBody>
+      </p:sp>
+      <p:sp>
+        <p:nvSpPr>
+          <p:cNvPr id="32" name="TextBox 31"/>
+          <p:cNvSpPr txBox="1"/>
+          <p:nvPr/>
+        </p:nvSpPr>
+        <p:spPr>
+          <a:xfrm>
+            <a:off x="7406640" y="3886200"/>
+            <a:ext cx="548640" cy="274320"/>
+          </a:xfrm>
+          <a:prstGeom prst="rect">
+            <a:avLst/>
+          </a:prstGeom>
+          <a:noFill/>
+        </p:spPr>
+        <p:txBody>
+          <a:bodyPr wrap="none">
+            <a:spAutoFit/>
+          </a:bodyPr>
+          <a:lstStyle/>
+          <a:p>
+            <a:pPr algn="ctr">
+              <a:defRPr sz="1200"/>
+            </a:pPr>
+            <a:r>
+              <a:t>1</a:t>
+            </a:r>
+          </a:p>
+        </p:txBody>
+      </p:sp>
+      <p:sp>
+        <p:nvSpPr>
+          <p:cNvPr id="33" name="Oval 32"/>
+          <p:cNvSpPr/>
+          <p:nvPr/>
+        </p:nvSpPr>
+        <p:spPr>
+          <a:xfrm>
+            <a:off x="9070848" y="3456432"/>
+            <a:ext cx="146304" cy="146304"/>
+          </a:xfrm>
+          <a:prstGeom prst="ellipse">
+            <a:avLst/>
+          </a:prstGeom>
+          <a:solidFill>
+            <a:srgbClr val="CB4335"/>
+          </a:solidFill>
+          <a:ln>
+            <a:noFill/>
+          </a:ln>
+        </p:spPr>
+        <p:style>
+          <a:lnRef idx="1">
+            <a:schemeClr val="accent1"/>
+          </a:lnRef>
+          <a:fillRef idx="3">
+            <a:schemeClr val="accent1"/>
+          </a:fillRef>
+          <a:effectRef idx="2">
+            <a:schemeClr val="accent1"/>
+          </a:effectRef>
+          <a:fontRef idx="minor">
+            <a:schemeClr val="lt1"/>
+          </a:fontRef>
+        </p:style>
+        <p:txBody>
+          <a:bodyPr rtlCol="0" anchor="ctr"/>
+          <a:lstStyle/>
+          <a:p>
+            <a:pPr algn="ctr"/>
+          </a:p>
+        </p:txBody>
+      </p:sp>
+      <p:sp>
+        <p:nvSpPr>
+          <p:cNvPr id="34" name="TextBox 33"/>
+          <p:cNvSpPr txBox="1"/>
+          <p:nvPr/>
+        </p:nvSpPr>
+        <p:spPr>
+          <a:xfrm>
+            <a:off x="8869680" y="3163824"/>
+            <a:ext cx="548640" cy="274320"/>
+          </a:xfrm>
+          <a:prstGeom prst="rect">
+            <a:avLst/>
+          </a:prstGeom>
+          <a:noFill/>
+        </p:spPr>
+        <p:txBody>
+          <a:bodyPr wrap="none">
+            <a:spAutoFit/>
+          </a:bodyPr>
+          <a:lstStyle/>
+          <a:p>
+            <a:pPr algn="ctr">
+              <a:defRPr sz="1400" b="1">
+                <a:solidFill>
+                  <a:srgbClr val="A3262A"/>
+                </a:solidFill>
+              </a:defRPr>
+            </a:pPr>
+            <a:r>
+              <a:t>2</a:t>
+            </a:r>
+          </a:p>
+        </p:txBody>
+      </p:sp>
+      <p:sp>
+        <p:nvSpPr>
+          <p:cNvPr id="35" name="TextBox 34"/>
+          <p:cNvSpPr txBox="1"/>
+          <p:nvPr/>
+        </p:nvSpPr>
+        <p:spPr>
+          <a:xfrm>
+            <a:off x="8869680" y="3886200"/>
+            <a:ext cx="548640" cy="274320"/>
+          </a:xfrm>
+          <a:prstGeom prst="rect">
+            <a:avLst/>
+          </a:prstGeom>
+          <a:noFill/>
+        </p:spPr>
+        <p:txBody>
+          <a:bodyPr wrap="none">
+            <a:spAutoFit/>
+          </a:bodyPr>
+          <a:lstStyle/>
+          <a:p>
+            <a:pPr algn="ctr">
+              <a:defRPr sz="1200"/>
+            </a:pPr>
+            <a:r>
+              <a:t>2</a:t>
+            </a:r>
+          </a:p>
+        </p:txBody>
+      </p:sp>
+      <p:sp>
+        <p:nvSpPr>
+          <p:cNvPr id="36" name="Oval 35"/>
+          <p:cNvSpPr/>
+          <p:nvPr/>
+        </p:nvSpPr>
+        <p:spPr>
+          <a:xfrm>
+            <a:off x="10533888" y="2368296"/>
+            <a:ext cx="146304" cy="146304"/>
+          </a:xfrm>
+          <a:prstGeom prst="ellipse">
+            <a:avLst/>
+          </a:prstGeom>
+          <a:solidFill>
+            <a:srgbClr val="CB4335"/>
+          </a:solidFill>
+          <a:ln>
+            <a:noFill/>
+          </a:ln>
+        </p:spPr>
+        <p:style>
+          <a:lnRef idx="1">
+            <a:schemeClr val="accent1"/>
+          </a:lnRef>
+          <a:fillRef idx="3">
+            <a:schemeClr val="accent1"/>
+          </a:fillRef>
+          <a:effectRef idx="2">
+            <a:schemeClr val="accent1"/>
+          </a:effectRef>
+          <a:fontRef idx="minor">
+            <a:schemeClr val="lt1"/>
+          </a:fontRef>
+        </p:style>
+        <p:txBody>
+          <a:bodyPr rtlCol="0" anchor="ctr"/>
+          <a:lstStyle/>
+          <a:p>
+            <a:pPr algn="ctr"/>
+          </a:p>
+        </p:txBody>
+      </p:sp>
+      <p:sp>
+        <p:nvSpPr>
+          <p:cNvPr id="37" name="TextBox 36"/>
+          <p:cNvSpPr txBox="1"/>
+          <p:nvPr/>
+        </p:nvSpPr>
+        <p:spPr>
+          <a:xfrm>
+            <a:off x="10332719" y="2075688"/>
+            <a:ext cx="548640" cy="274320"/>
+          </a:xfrm>
+          <a:prstGeom prst="rect">
+            <a:avLst/>
+          </a:prstGeom>
+          <a:noFill/>
+        </p:spPr>
+        <p:txBody>
+          <a:bodyPr wrap="none">
+            <a:spAutoFit/>
+          </a:bodyPr>
+          <a:lstStyle/>
+          <a:p>
+            <a:pPr algn="ctr">
+              <a:defRPr sz="1400" b="1">
+                <a:solidFill>
+                  <a:srgbClr val="A3262A"/>
+                </a:solidFill>
+              </a:defRPr>
+            </a:pPr>
+            <a:r>
+              <a:t>9</a:t>
+            </a:r>
+          </a:p>
+        </p:txBody>
+      </p:sp>
+      <p:sp>
+        <p:nvSpPr>
+          <p:cNvPr id="38" name="TextBox 37"/>
+          <p:cNvSpPr txBox="1"/>
+          <p:nvPr/>
+        </p:nvSpPr>
+        <p:spPr>
+          <a:xfrm>
+            <a:off x="10332719" y="3886200"/>
+            <a:ext cx="548640" cy="274320"/>
+          </a:xfrm>
+          <a:prstGeom prst="rect">
+            <a:avLst/>
+          </a:prstGeom>
+          <a:noFill/>
+        </p:spPr>
+        <p:txBody>
+          <a:bodyPr wrap="none">
+            <a:spAutoFit/>
+          </a:bodyPr>
+          <a:lstStyle/>
+          <a:p>
+            <a:pPr algn="ctr">
+              <a:defRPr sz="1200"/>
+            </a:pPr>
+            <a:r>
+              <a:t>3</a:t>
+            </a:r>
+          </a:p>
+        </p:txBody>
+      </p:sp>
+      <p:sp>
+        <p:nvSpPr>
+          <p:cNvPr id="39" name="TextBox 38"/>
+          <p:cNvSpPr txBox="1"/>
+          <p:nvPr/>
+        </p:nvSpPr>
+        <p:spPr>
+          <a:xfrm>
+            <a:off x="6583680" y="4114800"/>
+            <a:ext cx="5120640" cy="274320"/>
+          </a:xfrm>
+          <a:prstGeom prst="rect">
+            <a:avLst/>
+          </a:prstGeom>
+          <a:noFill/>
+        </p:spPr>
+        <p:txBody>
+          <a:bodyPr wrap="none">
+            <a:spAutoFit/>
+          </a:bodyPr>
+          <a:lstStyle/>
+          <a:p>
+            <a:pPr algn="ctr">
+              <a:defRPr sz="1200" b="1"/>
+            </a:pPr>
+            <a:r>
+              <a:t>轮次</a:t>
+            </a:r>
+          </a:p>
+        </p:txBody>
+      </p:sp>
+      <p:sp>
+        <p:nvSpPr>
+          <p:cNvPr id="40" name="Right Arrow 39"/>
+          <p:cNvSpPr/>
+          <p:nvPr/>
+        </p:nvSpPr>
+        <p:spPr>
+          <a:xfrm rot="19200000">
+            <a:off x="9326880" y="2743200"/>
+            <a:ext cx="1097280" cy="320040"/>
+          </a:xfrm>
+          <a:prstGeom prst="rightArrow">
+            <a:avLst/>
+          </a:prstGeom>
+          <a:solidFill>
+            <a:srgbClr val="E57373"/>
+          </a:solidFill>
+          <a:ln>
+            <a:noFill/>
+          </a:ln>
+        </p:spPr>
+        <p:style>
+          <a:lnRef idx="1">
+            <a:schemeClr val="accent1"/>
+          </a:lnRef>
+          <a:fillRef idx="3">
+            <a:schemeClr val="accent1"/>
+          </a:fillRef>
+          <a:effectRef idx="2">
+            <a:schemeClr val="accent1"/>
+          </a:effectRef>
+          <a:fontRef idx="minor">
+            <a:schemeClr val="lt1"/>
+          </a:fontRef>
+        </p:style>
+        <p:txBody>
+          <a:bodyPr rtlCol="0" anchor="ctr"/>
+          <a:lstStyle/>
+          <a:p>
+            <a:pPr algn="ctr"/>
+          </a:p>
+        </p:txBody>
+      </p:sp>
+      <p:sp>
+        <p:nvSpPr>
+          <p:cNvPr id="41" name="TextBox 40"/>
+          <p:cNvSpPr txBox="1"/>
+          <p:nvPr/>
+        </p:nvSpPr>
+        <p:spPr>
+          <a:xfrm>
+            <a:off x="10058400" y="2926080"/>
+            <a:ext cx="1371600" cy="365760"/>
+          </a:xfrm>
+          <a:prstGeom prst="rect">
+            <a:avLst/>
+          </a:prstGeom>
+          <a:noFill/>
+        </p:spPr>
+        <p:txBody>
+          <a:bodyPr wrap="none">
+            <a:spAutoFit/>
+          </a:bodyPr>
+          <a:lstStyle/>
+          <a:p>
+            <a:pPr>
+              <a:defRPr b="1" sz="1200">
+                <a:solidFill>
+                  <a:srgbClr val="A3262A"/>
+                </a:solidFill>
+              </a:defRPr>
+            </a:pPr>
+            <a:r>
+              <a:t>爆炸性增长</a:t>
+            </a:r>
+          </a:p>
+        </p:txBody>
+      </p:sp>
+      <p:sp>
+        <p:nvSpPr>
+          <p:cNvPr id="42" name="TextBox 41"/>
+          <p:cNvSpPr txBox="1"/>
+          <p:nvPr/>
+        </p:nvSpPr>
+        <p:spPr>
+          <a:xfrm>
+            <a:off x="6583680" y="4572000"/>
+            <a:ext cx="5120640" cy="365760"/>
+          </a:xfrm>
+          <a:prstGeom prst="rect">
+            <a:avLst/>
+          </a:prstGeom>
+          <a:noFill/>
+        </p:spPr>
+        <p:txBody>
+          <a:bodyPr wrap="none">
+            <a:spAutoFit/>
+          </a:bodyPr>
+          <a:lstStyle/>
+          <a:p>
+            <a:pPr algn="ctr">
+              <a:defRPr b="1" sz="1400"/>
+            </a:pPr>
+            <a:r>
+              <a:t>修复 vs 重写时间对比</a:t>
+            </a:r>
+          </a:p>
+        </p:txBody>
+      </p:sp>
+      <p:sp>
+        <p:nvSpPr>
+          <p:cNvPr id="43" name="Rectangle 42"/>
+          <p:cNvSpPr/>
+          <p:nvPr/>
+        </p:nvSpPr>
+        <p:spPr>
+          <a:xfrm>
+            <a:off x="8046720" y="5029200"/>
+            <a:ext cx="12700" cy="1005840"/>
+          </a:xfrm>
+          <a:prstGeom prst="rect">
             <a:avLst/>
           </a:prstGeom>
           <a:ln>
             <a:solidFill>
-              <a:srgbClr val="888888"/>
+              <a:srgbClr val="222222"/>
             </a:solidFill>
           </a:ln>
         </p:spPr>
         <p:style>
-          <a:lnRef idx="2">
+          <a:lnRef idx="1">
             <a:schemeClr val="accent1"/>
           </a:lnRef>
-          <a:fillRef idx="0">
+          <a:fillRef idx="3">
             <a:schemeClr val="accent1"/>
           </a:fillRef>
-          <a:effectRef idx="1">
+          <a:effectRef idx="2">
             <a:schemeClr val="accent1"/>
           </a:effectRef>
           <a:fontRef idx="minor">
-            <a:schemeClr val="tx1"/>
+            <a:schemeClr val="lt1"/>
           </a:fontRef>
         </p:style>
-      </p:cxnSp>
-      <p:sp>
-        <p:nvSpPr>
-          <p:cNvPr id="17" name="TextBox 16"/>
+        <p:txBody>
+          <a:bodyPr rtlCol="0" anchor="ctr"/>
+          <a:lstStyle/>
+          <a:p>
+            <a:pPr algn="ctr"/>
+          </a:p>
+        </p:txBody>
+      </p:sp>
+      <p:sp>
+        <p:nvSpPr>
+          <p:cNvPr id="44" name="TextBox 43"/>
           <p:cNvSpPr txBox="1"/>
           <p:nvPr/>
         </p:nvSpPr>
         <p:spPr>
           <a:xfrm>
-            <a:off x="457200" y="4389120"/>
-            <a:ext cx="365760" cy="1371600"/>
+            <a:off x="6675120" y="5029200"/>
+            <a:ext cx="1280160" cy="457200"/>
           </a:xfrm>
           <a:prstGeom prst="rect">
             <a:avLst/>
@@ -3712,156 +4766,79 @@
           <a:noFill/>
         </p:spPr>
         <p:txBody>
-          <a:bodyPr wrap="square">
+          <a:bodyPr wrap="none">
             <a:spAutoFit/>
           </a:bodyPr>
           <a:lstStyle/>
           <a:p>
-            <a:pPr algn="ctr">
-              <a:defRPr sz="1000">
-                <a:solidFill>
-                  <a:srgbClr val="AAAAAA"/>
-                </a:solidFill>
-              </a:defRPr>
+            <a:pPr algn="r">
+              <a:defRPr sz="1100"/>
             </a:pPr>
             <a:r>
-              <a:t>错</a:t>
-            </a:r>
-          </a:p>
-          <a:p>
-            <a:r>
-              <a:t>误</a:t>
-            </a:r>
-          </a:p>
-          <a:p>
-            <a:r>
-              <a:t>数</a:t>
-            </a:r>
-          </a:p>
-          <a:p>
-            <a:r>
-              <a:t>量</a:t>
-            </a:r>
-          </a:p>
-        </p:txBody>
-      </p:sp>
-      <p:sp>
-        <p:nvSpPr>
-          <p:cNvPr id="18" name="TextBox 17"/>
-          <p:cNvSpPr txBox="1"/>
+              <a:t>Claude Code 修复</a:t>
+            </a:r>
+            <a:br/>
+            <a:r>
+              <a:t>(8 天)</a:t>
+            </a:r>
+          </a:p>
+        </p:txBody>
+      </p:sp>
+      <p:sp>
+        <p:nvSpPr>
+          <p:cNvPr id="45" name="Rectangle 44"/>
+          <p:cNvSpPr/>
           <p:nvPr/>
         </p:nvSpPr>
         <p:spPr>
           <a:xfrm>
-            <a:off x="2926080" y="6126480"/>
-            <a:ext cx="914400" cy="365760"/>
+            <a:off x="8046720" y="5120640"/>
+            <a:ext cx="2743200" cy="365760"/>
           </a:xfrm>
           <a:prstGeom prst="rect">
             <a:avLst/>
           </a:prstGeom>
-          <a:noFill/>
-        </p:spPr>
-        <p:txBody>
-          <a:bodyPr wrap="none">
-            <a:spAutoFit/>
-          </a:bodyPr>
-          <a:lstStyle/>
-          <a:p>
-            <a:pPr>
-              <a:defRPr sz="1000">
-                <a:solidFill>
-                  <a:srgbClr val="AAAAAA"/>
-                </a:solidFill>
-              </a:defRPr>
-            </a:pPr>
-            <a:r>
-              <a:t>修复迭代</a:t>
-            </a:r>
-          </a:p>
-        </p:txBody>
-      </p:sp>
-      <p:cxnSp>
-        <p:nvCxnSpPr>
-          <p:cNvPr id="19" name="Connector 18"/>
-          <p:cNvCxnSpPr/>
-          <p:nvPr/>
-        </p:nvCxnSpPr>
-        <p:spPr>
-          <a:xfrm>
-            <a:off x="1280160" y="5577840"/>
-            <a:ext cx="822960" cy="182880"/>
-          </a:xfrm>
-          <a:prstGeom prst="line">
-            <a:avLst/>
-          </a:prstGeom>
-          <a:ln w="25400">
-            <a:solidFill>
-              <a:srgbClr val="E53935"/>
-            </a:solidFill>
+          <a:solidFill>
+            <a:srgbClr val="CB4335"/>
+          </a:solidFill>
+          <a:ln>
+            <a:noFill/>
           </a:ln>
         </p:spPr>
         <p:style>
-          <a:lnRef idx="2">
+          <a:lnRef idx="1">
             <a:schemeClr val="accent1"/>
           </a:lnRef>
-          <a:fillRef idx="0">
+          <a:fillRef idx="3">
             <a:schemeClr val="accent1"/>
           </a:fillRef>
-          <a:effectRef idx="1">
+          <a:effectRef idx="2">
             <a:schemeClr val="accent1"/>
           </a:effectRef>
           <a:fontRef idx="minor">
-            <a:schemeClr val="tx1"/>
+            <a:schemeClr val="lt1"/>
           </a:fontRef>
         </p:style>
-      </p:cxnSp>
-      <p:cxnSp>
-        <p:nvCxnSpPr>
-          <p:cNvPr id="20" name="Connector 19"/>
-          <p:cNvCxnSpPr/>
-          <p:nvPr/>
-        </p:nvCxnSpPr>
-        <p:spPr>
-          <a:xfrm flipV="1">
-            <a:off x="2103120" y="4572000"/>
-            <a:ext cx="1097280" cy="1188720"/>
-          </a:xfrm>
-          <a:prstGeom prst="line">
-            <a:avLst/>
-          </a:prstGeom>
-          <a:ln w="25400">
-            <a:solidFill>
-              <a:srgbClr val="E53935"/>
-            </a:solidFill>
-          </a:ln>
-        </p:spPr>
-        <p:style>
-          <a:lnRef idx="2">
-            <a:schemeClr val="accent1"/>
-          </a:lnRef>
-          <a:fillRef idx="0">
-            <a:schemeClr val="accent1"/>
-          </a:fillRef>
-          <a:effectRef idx="1">
-            <a:schemeClr val="accent1"/>
-          </a:effectRef>
-          <a:fontRef idx="minor">
-            <a:schemeClr val="tx1"/>
-          </a:fontRef>
-        </p:style>
-      </p:cxnSp>
-      <p:sp>
-        <p:nvSpPr>
-          <p:cNvPr id="21" name="Oval 20"/>
+        <p:txBody>
+          <a:bodyPr rtlCol="0" anchor="ctr"/>
+          <a:lstStyle/>
+          <a:p>
+            <a:pPr algn="ctr"/>
+          </a:p>
+        </p:txBody>
+      </p:sp>
+      <p:sp>
+        <p:nvSpPr>
+          <p:cNvPr id="46" name="Rounded Rectangle 45"/>
           <p:cNvSpPr/>
           <p:nvPr/>
         </p:nvSpPr>
         <p:spPr>
           <a:xfrm>
-            <a:off x="1234440" y="5532120"/>
-            <a:ext cx="91440" cy="91440"/>
-          </a:xfrm>
-          <a:prstGeom prst="ellipse">
+            <a:off x="9692640" y="5166360"/>
+            <a:ext cx="1005840" cy="274320"/>
+          </a:xfrm>
+          <a:prstGeom prst="roundRect">
             <a:avLst/>
           </a:prstGeom>
           <a:solidFill>
@@ -3869,7 +4846,7 @@
           </a:solidFill>
           <a:ln w="19050">
             <a:solidFill>
-              <a:srgbClr val="E53935"/>
+              <a:srgbClr val="CB4335"/>
             </a:solidFill>
           </a:ln>
         </p:spPr>
@@ -3891,31 +4868,69 @@
           <a:bodyPr rtlCol="0" anchor="ctr"/>
           <a:lstStyle/>
           <a:p>
-            <a:pPr algn="ctr"/>
-          </a:p>
-        </p:txBody>
-      </p:sp>
-      <p:sp>
-        <p:nvSpPr>
-          <p:cNvPr id="22" name="Oval 21"/>
+            <a:pPr algn="ctr">
+              <a:defRPr sz="1100" b="1">
+                <a:solidFill>
+                  <a:srgbClr val="CB4335"/>
+                </a:solidFill>
+              </a:defRPr>
+            </a:pPr>
+            <a:r>
+              <a:t>+60% 时间</a:t>
+            </a:r>
+          </a:p>
+        </p:txBody>
+      </p:sp>
+      <p:sp>
+        <p:nvSpPr>
+          <p:cNvPr id="47" name="TextBox 46"/>
+          <p:cNvSpPr txBox="1"/>
+          <p:nvPr/>
+        </p:nvSpPr>
+        <p:spPr>
+          <a:xfrm>
+            <a:off x="6675120" y="5623560"/>
+            <a:ext cx="1280160" cy="365760"/>
+          </a:xfrm>
+          <a:prstGeom prst="rect">
+            <a:avLst/>
+          </a:prstGeom>
+          <a:noFill/>
+        </p:spPr>
+        <p:txBody>
+          <a:bodyPr wrap="none">
+            <a:spAutoFit/>
+          </a:bodyPr>
+          <a:lstStyle/>
+          <a:p>
+            <a:pPr algn="r">
+              <a:defRPr sz="1100"/>
+            </a:pPr>
+            <a:r>
+              <a:t>手动重写 (5 天)</a:t>
+            </a:r>
+          </a:p>
+        </p:txBody>
+      </p:sp>
+      <p:sp>
+        <p:nvSpPr>
+          <p:cNvPr id="48" name="Rectangle 47"/>
           <p:cNvSpPr/>
           <p:nvPr/>
         </p:nvSpPr>
         <p:spPr>
           <a:xfrm>
-            <a:off x="2057400" y="5715000"/>
-            <a:ext cx="91440" cy="91440"/>
-          </a:xfrm>
-          <a:prstGeom prst="ellipse">
+            <a:off x="8046720" y="5623560"/>
+            <a:ext cx="1714500" cy="365760"/>
+          </a:xfrm>
+          <a:prstGeom prst="rect">
             <a:avLst/>
           </a:prstGeom>
           <a:solidFill>
-            <a:srgbClr val="FFFFFF"/>
+            <a:srgbClr val="BDC3C7"/>
           </a:solidFill>
-          <a:ln w="19050">
-            <a:solidFill>
-              <a:srgbClr val="E53935"/>
-            </a:solidFill>
+          <a:ln>
+            <a:noFill/>
           </a:ln>
         </p:spPr>
         <p:style>
@@ -3942,59 +4957,14 @@
       </p:sp>
       <p:sp>
         <p:nvSpPr>
-          <p:cNvPr id="23" name="Oval 22"/>
-          <p:cNvSpPr/>
-          <p:nvPr/>
-        </p:nvSpPr>
-        <p:spPr>
-          <a:xfrm>
-            <a:off x="3154680" y="4526280"/>
-            <a:ext cx="91440" cy="91440"/>
-          </a:xfrm>
-          <a:prstGeom prst="ellipse">
-            <a:avLst/>
-          </a:prstGeom>
-          <a:solidFill>
-            <a:srgbClr val="FFFFFF"/>
-          </a:solidFill>
-          <a:ln w="19050">
-            <a:solidFill>
-              <a:srgbClr val="E53935"/>
-            </a:solidFill>
-          </a:ln>
-        </p:spPr>
-        <p:style>
-          <a:lnRef idx="1">
-            <a:schemeClr val="accent1"/>
-          </a:lnRef>
-          <a:fillRef idx="3">
-            <a:schemeClr val="accent1"/>
-          </a:fillRef>
-          <a:effectRef idx="2">
-            <a:schemeClr val="accent1"/>
-          </a:effectRef>
-          <a:fontRef idx="minor">
-            <a:schemeClr val="lt1"/>
-          </a:fontRef>
-        </p:style>
-        <p:txBody>
-          <a:bodyPr rtlCol="0" anchor="ctr"/>
-          <a:lstStyle/>
-          <a:p>
-            <a:pPr algn="ctr"/>
-          </a:p>
-        </p:txBody>
-      </p:sp>
-      <p:sp>
-        <p:nvSpPr>
-          <p:cNvPr id="24" name="TextBox 23"/>
+          <p:cNvPr id="49" name="TextBox 48"/>
           <p:cNvSpPr txBox="1"/>
           <p:nvPr/>
         </p:nvSpPr>
         <p:spPr>
           <a:xfrm>
-            <a:off x="1097280" y="5303520"/>
-            <a:ext cx="365760" cy="274320"/>
+            <a:off x="11430000" y="6400800"/>
+            <a:ext cx="731520" cy="365760"/>
           </a:xfrm>
           <a:prstGeom prst="rect">
             <a:avLst/>
@@ -4008,586 +4978,14 @@
           <a:lstStyle/>
           <a:p>
             <a:pPr>
-              <a:defRPr>
-                <a:solidFill>
-                  <a:srgbClr val="FFFFFF"/>
-                </a:solidFill>
-              </a:defRPr>
-            </a:pPr>
-            <a:r>
-              <a:t>3</a:t>
-            </a:r>
-          </a:p>
-        </p:txBody>
-      </p:sp>
-      <p:sp>
-        <p:nvSpPr>
-          <p:cNvPr id="25" name="TextBox 24"/>
-          <p:cNvSpPr txBox="1"/>
-          <p:nvPr/>
-        </p:nvSpPr>
-        <p:spPr>
-          <a:xfrm>
-            <a:off x="1920240" y="5486400"/>
-            <a:ext cx="365760" cy="274320"/>
-          </a:xfrm>
-          <a:prstGeom prst="rect">
-            <a:avLst/>
-          </a:prstGeom>
-          <a:noFill/>
-        </p:spPr>
-        <p:txBody>
-          <a:bodyPr wrap="none">
-            <a:spAutoFit/>
-          </a:bodyPr>
-          <a:lstStyle/>
-          <a:p>
-            <a:pPr>
-              <a:defRPr>
-                <a:solidFill>
-                  <a:srgbClr val="FFFFFF"/>
-                </a:solidFill>
-              </a:defRPr>
-            </a:pPr>
-            <a:r>
-              <a:t>2</a:t>
-            </a:r>
-          </a:p>
-        </p:txBody>
-      </p:sp>
-      <p:sp>
-        <p:nvSpPr>
-          <p:cNvPr id="26" name="TextBox 25"/>
-          <p:cNvSpPr txBox="1"/>
-          <p:nvPr/>
-        </p:nvSpPr>
-        <p:spPr>
-          <a:xfrm>
-            <a:off x="3108960" y="4297680"/>
-            <a:ext cx="365760" cy="274320"/>
-          </a:xfrm>
-          <a:prstGeom prst="rect">
-            <a:avLst/>
-          </a:prstGeom>
-          <a:noFill/>
-        </p:spPr>
-        <p:txBody>
-          <a:bodyPr wrap="none">
-            <a:spAutoFit/>
-          </a:bodyPr>
-          <a:lstStyle/>
-          <a:p>
-            <a:pPr>
-              <a:defRPr>
-                <a:solidFill>
-                  <a:srgbClr val="FFFFFF"/>
-                </a:solidFill>
-              </a:defRPr>
-            </a:pPr>
-            <a:r>
-              <a:t>9</a:t>
-            </a:r>
-          </a:p>
-        </p:txBody>
-      </p:sp>
-      <p:sp>
-        <p:nvSpPr>
-          <p:cNvPr id="27" name="TextBox 26"/>
-          <p:cNvSpPr txBox="1"/>
-          <p:nvPr/>
-        </p:nvSpPr>
-        <p:spPr>
-          <a:xfrm rot="19500000">
-            <a:off x="2194560" y="4937760"/>
-            <a:ext cx="914400" cy="274320"/>
-          </a:xfrm>
-          <a:prstGeom prst="rect">
-            <a:avLst/>
-          </a:prstGeom>
-          <a:noFill/>
-        </p:spPr>
-        <p:txBody>
-          <a:bodyPr wrap="none">
-            <a:spAutoFit/>
-          </a:bodyPr>
-          <a:lstStyle/>
-          <a:p>
-            <a:pPr>
-              <a:defRPr sz="1000">
-                <a:solidFill>
-                  <a:srgbClr val="FFFFFF"/>
-                </a:solidFill>
-              </a:defRPr>
-            </a:pPr>
-            <a:r>
-              <a:t>3→2→9</a:t>
-            </a:r>
-          </a:p>
-        </p:txBody>
-      </p:sp>
-      <p:sp>
-        <p:nvSpPr>
-          <p:cNvPr id="28" name="Isosceles Triangle 27"/>
-          <p:cNvSpPr/>
-          <p:nvPr/>
-        </p:nvSpPr>
-        <p:spPr>
-          <a:xfrm>
-            <a:off x="3840480" y="4389120"/>
-            <a:ext cx="274320" cy="274320"/>
-          </a:xfrm>
-          <a:prstGeom prst="triangle">
-            <a:avLst/>
-          </a:prstGeom>
-          <a:solidFill>
-            <a:srgbClr val="E53935"/>
-          </a:solidFill>
-          <a:ln>
-            <a:noFill/>
-          </a:ln>
-        </p:spPr>
-        <p:style>
-          <a:lnRef idx="1">
-            <a:schemeClr val="accent1"/>
-          </a:lnRef>
-          <a:fillRef idx="3">
-            <a:schemeClr val="accent1"/>
-          </a:fillRef>
-          <a:effectRef idx="2">
-            <a:schemeClr val="accent1"/>
-          </a:effectRef>
-          <a:fontRef idx="minor">
-            <a:schemeClr val="lt1"/>
-          </a:fontRef>
-        </p:style>
-        <p:txBody>
-          <a:bodyPr rtlCol="0" anchor="ctr"/>
-          <a:lstStyle/>
-          <a:p>
-            <a:pPr algn="ctr"/>
-          </a:p>
-        </p:txBody>
-      </p:sp>
-      <p:sp>
-        <p:nvSpPr>
-          <p:cNvPr id="29" name="TextBox 28"/>
-          <p:cNvSpPr txBox="1"/>
-          <p:nvPr/>
-        </p:nvSpPr>
-        <p:spPr>
-          <a:xfrm>
-            <a:off x="3794760" y="4389120"/>
-            <a:ext cx="365760" cy="274320"/>
-          </a:xfrm>
-          <a:prstGeom prst="rect">
-            <a:avLst/>
-          </a:prstGeom>
-          <a:noFill/>
-        </p:spPr>
-        <p:txBody>
-          <a:bodyPr wrap="none">
-            <a:spAutoFit/>
-          </a:bodyPr>
-          <a:lstStyle/>
-          <a:p>
-            <a:pPr algn="ctr">
-              <a:defRPr b="1">
-                <a:solidFill>
-                  <a:srgbClr val="FFFFFF"/>
-                </a:solidFill>
-              </a:defRPr>
-            </a:pPr>
-            <a:r>
-              <a:t>!</a:t>
-            </a:r>
-          </a:p>
-        </p:txBody>
-      </p:sp>
-      <p:sp>
-        <p:nvSpPr>
-          <p:cNvPr id="30" name="TextBox 29"/>
-          <p:cNvSpPr txBox="1"/>
-          <p:nvPr/>
-        </p:nvSpPr>
-        <p:spPr>
-          <a:xfrm>
-            <a:off x="4206240" y="4343400"/>
-            <a:ext cx="1828800" cy="365760"/>
-          </a:xfrm>
-          <a:prstGeom prst="rect">
-            <a:avLst/>
-          </a:prstGeom>
-          <a:noFill/>
-        </p:spPr>
-        <p:txBody>
-          <a:bodyPr wrap="none">
-            <a:spAutoFit/>
-          </a:bodyPr>
-          <a:lstStyle/>
-          <a:p>
-            <a:pPr>
-              <a:defRPr sz="1600" b="1">
-                <a:solidFill>
-                  <a:srgbClr val="FFFFFF"/>
-                </a:solidFill>
-              </a:defRPr>
-            </a:pPr>
-            <a:r>
-              <a:t>修复爆炸</a:t>
-            </a:r>
-          </a:p>
-        </p:txBody>
-      </p:sp>
-      <p:sp>
-        <p:nvSpPr>
-          <p:cNvPr id="31" name="TextBox 30"/>
-          <p:cNvSpPr txBox="1"/>
-          <p:nvPr/>
-        </p:nvSpPr>
-        <p:spPr>
-          <a:xfrm>
-            <a:off x="3840480" y="4846320"/>
-            <a:ext cx="2377440" cy="1371600"/>
-          </a:xfrm>
-          <a:prstGeom prst="rect">
-            <a:avLst/>
-          </a:prstGeom>
-          <a:noFill/>
-        </p:spPr>
-        <p:txBody>
-          <a:bodyPr wrap="square">
-            <a:spAutoFit/>
-          </a:bodyPr>
-          <a:lstStyle/>
-          <a:p>
-            <a:pPr>
               <a:defRPr sz="1200">
-                <a:solidFill>
-                  <a:srgbClr val="CCCCCC"/>
-                </a:solidFill>
-              </a:defRPr>
-            </a:pPr>
-            <a:r>
-              <a:t>错误呈 </a:t>
-            </a:r>
-            <a:r>
-              <a:rPr>
-                <a:solidFill>
-                  <a:srgbClr val="E53935"/>
-                </a:solidFill>
-              </a:rPr>
-              <a:t>3→2→9</a:t>
-            </a:r>
-            <a:r>
-              <a:t> 非线性增长，前序修正引发后续逻辑大规模崩溃</a:t>
-            </a:r>
-          </a:p>
-        </p:txBody>
-      </p:sp>
-      <p:sp>
-        <p:nvSpPr>
-          <p:cNvPr id="32" name="Rounded Rectangle 31"/>
-          <p:cNvSpPr/>
-          <p:nvPr/>
-        </p:nvSpPr>
-        <p:spPr>
-          <a:xfrm>
-            <a:off x="6858000" y="4114800"/>
-            <a:ext cx="731520" cy="731520"/>
-          </a:xfrm>
-          <a:prstGeom prst="roundRect">
-            <a:avLst/>
-          </a:prstGeom>
-          <a:solidFill>
-            <a:srgbClr val="333333"/>
-          </a:solidFill>
-          <a:ln>
-            <a:noFill/>
-          </a:ln>
-        </p:spPr>
-        <p:style>
-          <a:lnRef idx="1">
-            <a:schemeClr val="accent1"/>
-          </a:lnRef>
-          <a:fillRef idx="3">
-            <a:schemeClr val="accent1"/>
-          </a:fillRef>
-          <a:effectRef idx="2">
-            <a:schemeClr val="accent1"/>
-          </a:effectRef>
-          <a:fontRef idx="minor">
-            <a:schemeClr val="lt1"/>
-          </a:fontRef>
-        </p:style>
-        <p:txBody>
-          <a:bodyPr rtlCol="0" anchor="ctr"/>
-          <a:lstStyle/>
-          <a:p>
-            <a:pPr algn="ctr"/>
-          </a:p>
-        </p:txBody>
-      </p:sp>
-      <p:sp>
-        <p:nvSpPr>
-          <p:cNvPr id="33" name="TextBox 32"/>
-          <p:cNvSpPr txBox="1"/>
-          <p:nvPr/>
-        </p:nvSpPr>
-        <p:spPr>
-          <a:xfrm>
-            <a:off x="7772400" y="4023360"/>
-            <a:ext cx="3657600" cy="365760"/>
-          </a:xfrm>
-          <a:prstGeom prst="rect">
-            <a:avLst/>
-          </a:prstGeom>
-          <a:noFill/>
-        </p:spPr>
-        <p:txBody>
-          <a:bodyPr wrap="none">
-            <a:spAutoFit/>
-          </a:bodyPr>
-          <a:lstStyle/>
-          <a:p>
-            <a:pPr>
-              <a:defRPr sz="1600" b="1">
-                <a:solidFill>
-                  <a:srgbClr val="FFFFFF"/>
-                </a:solidFill>
-              </a:defRPr>
-            </a:pPr>
-            <a:r>
-              <a:t>解析能力</a:t>
-            </a:r>
-          </a:p>
-        </p:txBody>
-      </p:sp>
-      <p:sp>
-        <p:nvSpPr>
-          <p:cNvPr id="34" name="TextBox 33"/>
-          <p:cNvSpPr txBox="1"/>
-          <p:nvPr/>
-        </p:nvSpPr>
-        <p:spPr>
-          <a:xfrm>
-            <a:off x="7772400" y="4389120"/>
-            <a:ext cx="4114800" cy="731520"/>
-          </a:xfrm>
-          <a:prstGeom prst="rect">
-            <a:avLst/>
-          </a:prstGeom>
-          <a:noFill/>
-        </p:spPr>
-        <p:txBody>
-          <a:bodyPr wrap="square">
-            <a:spAutoFit/>
-          </a:bodyPr>
-          <a:lstStyle/>
-          <a:p>
-            <a:pPr>
-              <a:defRPr sz="1200">
-                <a:solidFill>
-                  <a:srgbClr val="CCCCCC"/>
-                </a:solidFill>
-              </a:defRPr>
-            </a:pPr>
-            <a:r>
-              <a:t>Claude 虽支持文档解析，但在处理 </a:t>
-            </a:r>
-            <a:r>
-              <a:rPr>
-                <a:solidFill>
-                  <a:srgbClr val="E53935"/>
-                </a:solidFill>
-              </a:rPr>
-              <a:t>10+</a:t>
-            </a:r>
-            <a:r>
-              <a:t> 项虚构数据字典时表现乏力</a:t>
-            </a:r>
-          </a:p>
-        </p:txBody>
-      </p:sp>
-      <p:cxnSp>
-        <p:nvCxnSpPr>
-          <p:cNvPr id="35" name="Connector 34"/>
-          <p:cNvCxnSpPr/>
-          <p:nvPr/>
-        </p:nvCxnSpPr>
-        <p:spPr>
-          <a:xfrm>
-            <a:off x="6858000" y="5212080"/>
-            <a:ext cx="4846320" cy="0"/>
-          </a:xfrm>
-          <a:prstGeom prst="line">
-            <a:avLst/>
-          </a:prstGeom>
-          <a:ln>
-            <a:solidFill>
-              <a:srgbClr val="444444"/>
-            </a:solidFill>
-            <a:prstDash val="sysDash"/>
-          </a:ln>
-        </p:spPr>
-        <p:style>
-          <a:lnRef idx="2">
-            <a:schemeClr val="accent1"/>
-          </a:lnRef>
-          <a:fillRef idx="0">
-            <a:schemeClr val="accent1"/>
-          </a:fillRef>
-          <a:effectRef idx="1">
-            <a:schemeClr val="accent1"/>
-          </a:effectRef>
-          <a:fontRef idx="minor">
-            <a:schemeClr val="tx1"/>
-          </a:fontRef>
-        </p:style>
-      </p:cxnSp>
-      <p:sp>
-        <p:nvSpPr>
-          <p:cNvPr id="36" name="Rounded Rectangle 35"/>
-          <p:cNvSpPr/>
-          <p:nvPr/>
-        </p:nvSpPr>
-        <p:spPr>
-          <a:xfrm>
-            <a:off x="6858000" y="5486400"/>
-            <a:ext cx="731520" cy="731520"/>
-          </a:xfrm>
-          <a:prstGeom prst="roundRect">
-            <a:avLst/>
-          </a:prstGeom>
-          <a:solidFill>
-            <a:srgbClr val="333333"/>
-          </a:solidFill>
-          <a:ln>
-            <a:noFill/>
-          </a:ln>
-        </p:spPr>
-        <p:style>
-          <a:lnRef idx="1">
-            <a:schemeClr val="accent1"/>
-          </a:lnRef>
-          <a:fillRef idx="3">
-            <a:schemeClr val="accent1"/>
-          </a:fillRef>
-          <a:effectRef idx="2">
-            <a:schemeClr val="accent1"/>
-          </a:effectRef>
-          <a:fontRef idx="minor">
-            <a:schemeClr val="lt1"/>
-          </a:fontRef>
-        </p:style>
-        <p:txBody>
-          <a:bodyPr rtlCol="0" anchor="ctr"/>
-          <a:lstStyle/>
-          <a:p>
-            <a:pPr algn="ctr"/>
-          </a:p>
-        </p:txBody>
-      </p:sp>
-      <p:sp>
-        <p:nvSpPr>
-          <p:cNvPr id="37" name="TextBox 36"/>
-          <p:cNvSpPr txBox="1"/>
-          <p:nvPr/>
-        </p:nvSpPr>
-        <p:spPr>
-          <a:xfrm>
-            <a:off x="7772400" y="5394960"/>
-            <a:ext cx="3657600" cy="365760"/>
-          </a:xfrm>
-          <a:prstGeom prst="rect">
-            <a:avLst/>
-          </a:prstGeom>
-          <a:noFill/>
-        </p:spPr>
-        <p:txBody>
-          <a:bodyPr wrap="none">
-            <a:spAutoFit/>
-          </a:bodyPr>
-          <a:lstStyle/>
-          <a:p>
-            <a:pPr>
-              <a:defRPr sz="1600" b="1">
-                <a:solidFill>
-                  <a:srgbClr val="FFFFFF"/>
-                </a:solidFill>
-              </a:defRPr>
-            </a:pPr>
-            <a:r>
-              <a:t>实测评价</a:t>
-            </a:r>
-          </a:p>
-        </p:txBody>
-      </p:sp>
-      <p:sp>
-        <p:nvSpPr>
-          <p:cNvPr id="38" name="TextBox 37"/>
-          <p:cNvSpPr txBox="1"/>
-          <p:nvPr/>
-        </p:nvSpPr>
-        <p:spPr>
-          <a:xfrm>
-            <a:off x="7772400" y="5760720"/>
-            <a:ext cx="4114800" cy="731520"/>
-          </a:xfrm>
-          <a:prstGeom prst="rect">
-            <a:avLst/>
-          </a:prstGeom>
-          <a:noFill/>
-        </p:spPr>
-        <p:txBody>
-          <a:bodyPr wrap="square">
-            <a:spAutoFit/>
-          </a:bodyPr>
-          <a:lstStyle/>
-          <a:p>
-            <a:pPr>
-              <a:defRPr sz="1200">
-                <a:solidFill>
-                  <a:srgbClr val="CCCCCC"/>
-                </a:solidFill>
-              </a:defRPr>
-            </a:pPr>
-            <a:r>
-              <a:t>底层数据结构理解缺失，导致“修复成本 &gt; 直接重写”</a:t>
-            </a:r>
-          </a:p>
-        </p:txBody>
-      </p:sp>
-      <p:sp>
-        <p:nvSpPr>
-          <p:cNvPr id="39" name="TextBox 38"/>
-          <p:cNvSpPr txBox="1"/>
-          <p:nvPr/>
-        </p:nvSpPr>
-        <p:spPr>
-          <a:xfrm>
-            <a:off x="10972800" y="6400800"/>
-            <a:ext cx="914400" cy="365760"/>
-          </a:xfrm>
-          <a:prstGeom prst="rect">
-            <a:avLst/>
-          </a:prstGeom>
-          <a:noFill/>
-        </p:spPr>
-        <p:txBody>
-          <a:bodyPr wrap="none">
-            <a:spAutoFit/>
-          </a:bodyPr>
-          <a:lstStyle/>
-          <a:p>
-            <a:pPr algn="r">
-              <a:defRPr sz="1000">
                 <a:solidFill>
                   <a:srgbClr val="666666"/>
                 </a:solidFill>
               </a:defRPr>
             </a:pPr>
             <a:r>
-              <a:t>第 3 页</a:t>
+              <a:t>3 / 4</a:t>
             </a:r>
           </a:p>
         </p:txBody>
